--- a/templates/shortlist-executive-template.pptx
+++ b/templates/shortlist-executive-template.pptx
@@ -9456,26 +9456,4 @@
     </a:ext>
   </a:extLst>
 </a:theme>
-</file>
-
-<file path=ppt/webextensions/taskpanes.xml><?xml version="1.0" encoding="utf-8"?>
-<wetp:taskpanes xmlns:wetp="http://schemas.microsoft.com/office/webextensions/taskpanes/2010/11">
-  <wetp:taskpane dockstate="right" visibility="0" width="350" row="0">
-    <wetp:webextensionref xmlns:r="http://schemas.openxmlformats.org/officeDocument/2006/relationships" r:id="rId1"/>
-  </wetp:taskpane>
-</wetp:taskpanes>
-</file>
-
-<file path=ppt/webextensions/webextension1.xml><?xml version="1.0" encoding="utf-8"?>
-<we:webextension xmlns:we="http://schemas.microsoft.com/office/webextensions/webextension/2010/11" id="{A5FCD6BB-B4A9-4853-AB7A-ED8FE93142DE}">
-  <we:reference id="WA200010001" version="1.0.0.1" store="Omex" storeType="OMEX"/>
-  <we:alternateReferences>
-    <we:reference id="WA200010001" version="1.0.0.1" store="WA200010001" storeType="OMEX"/>
-  </we:alternateReferences>
-  <we:properties>
-    <we:property name="Office.AutoShowTaskpaneWithDocument" value="true"/>
-  </we:properties>
-  <we:bindings/>
-  <we:snapshot xmlns:r="http://schemas.openxmlformats.org/officeDocument/2006/relationships"/>
-</we:webextension>
 </file>